--- a/presentation/CineMax_Multiplex_Revenue_Operations_Analytics_Presentation.pptx
+++ b/presentation/CineMax_Multiplex_Revenue_Operations_Analytics_Presentation.pptx
@@ -570,7 +570,7 @@
             </a:ln>
             <a:extLst>
               <a:ext uri="{91240B29-F687-4f45-9708-019B960494DF}">
-                <a14:hiddenLine xmlns="" xmlns:a14="http://schemas.microsoft.com/office/drawing/2010/main" w="9525">
+                <a14:hiddenLine xmlns:a14="http://schemas.microsoft.com/office/drawing/2010/main" xmlns="" w="9525">
                   <a:solidFill>
                     <a:srgbClr val="000000"/>
                   </a:solidFill>
@@ -767,7 +767,7 @@
           <a:p>
             <a:fld id="{5BCAD085-E8A6-8845-BD4E-CB4CCA059FC4}" type="datetimeFigureOut">
               <a:rPr lang="en-US" smtClean="0"/>
-              <a:t>7/10/2026</a:t>
+              <a:t>7/14/2026</a:t>
             </a:fld>
             <a:endParaRPr lang="en-US"/>
           </a:p>
@@ -1651,7 +1651,7 @@
             </a:ln>
             <a:extLst>
               <a:ext uri="{91240B29-F687-4f45-9708-019B960494DF}">
-                <a14:hiddenLine xmlns="" xmlns:a14="http://schemas.microsoft.com/office/drawing/2010/main" w="9525">
+                <a14:hiddenLine xmlns:a14="http://schemas.microsoft.com/office/drawing/2010/main" xmlns="" w="9525">
                   <a:solidFill>
                     <a:srgbClr val="000000"/>
                   </a:solidFill>
@@ -1868,7 +1868,7 @@
           <a:p>
             <a:fld id="{5BCAD085-E8A6-8845-BD4E-CB4CCA059FC4}" type="datetimeFigureOut">
               <a:rPr lang="en-US" smtClean="0"/>
-              <a:t>7/10/2026</a:t>
+              <a:t>7/14/2026</a:t>
             </a:fld>
             <a:endParaRPr lang="en-US"/>
           </a:p>
@@ -2737,7 +2737,7 @@
             </a:ln>
             <a:extLst>
               <a:ext uri="{91240B29-F687-4f45-9708-019B960494DF}">
-                <a14:hiddenLine xmlns="" xmlns:a14="http://schemas.microsoft.com/office/drawing/2010/main" w="9525">
+                <a14:hiddenLine xmlns:a14="http://schemas.microsoft.com/office/drawing/2010/main" xmlns="" w="9525">
                   <a:solidFill>
                     <a:srgbClr val="000000"/>
                   </a:solidFill>
@@ -2866,7 +2866,7 @@
           <a:p>
             <a:fld id="{5BCAD085-E8A6-8845-BD4E-CB4CCA059FC4}" type="datetimeFigureOut">
               <a:rPr lang="en-US" smtClean="0"/>
-              <a:t>7/10/2026</a:t>
+              <a:t>7/14/2026</a:t>
             </a:fld>
             <a:endParaRPr lang="en-US"/>
           </a:p>
@@ -3698,7 +3698,7 @@
             </a:ln>
             <a:extLst>
               <a:ext uri="{91240B29-F687-4f45-9708-019B960494DF}">
-                <a14:hiddenLine xmlns="" xmlns:a14="http://schemas.microsoft.com/office/drawing/2010/main" w="9525">
+                <a14:hiddenLine xmlns:a14="http://schemas.microsoft.com/office/drawing/2010/main" xmlns="" w="9525">
                   <a:solidFill>
                     <a:srgbClr val="000000"/>
                   </a:solidFill>
@@ -3981,7 +3981,7 @@
           <a:p>
             <a:fld id="{5BCAD085-E8A6-8845-BD4E-CB4CCA059FC4}" type="datetimeFigureOut">
               <a:rPr lang="en-US" smtClean="0"/>
-              <a:t>7/10/2026</a:t>
+              <a:t>7/14/2026</a:t>
             </a:fld>
             <a:endParaRPr lang="en-US"/>
           </a:p>
@@ -4813,7 +4813,7 @@
             </a:ln>
             <a:extLst>
               <a:ext uri="{91240B29-F687-4f45-9708-019B960494DF}">
-                <a14:hiddenLine xmlns="" xmlns:a14="http://schemas.microsoft.com/office/drawing/2010/main" w="9525">
+                <a14:hiddenLine xmlns:a14="http://schemas.microsoft.com/office/drawing/2010/main" xmlns="" w="9525">
                   <a:solidFill>
                     <a:srgbClr val="000000"/>
                   </a:solidFill>
@@ -4995,7 +4995,7 @@
           <a:p>
             <a:fld id="{5BCAD085-E8A6-8845-BD4E-CB4CCA059FC4}" type="datetimeFigureOut">
               <a:rPr lang="en-US" smtClean="0"/>
-              <a:t>7/10/2026</a:t>
+              <a:t>7/14/2026</a:t>
             </a:fld>
             <a:endParaRPr lang="en-US"/>
           </a:p>
@@ -5667,7 +5667,7 @@
           <a:p>
             <a:fld id="{5BCAD085-E8A6-8845-BD4E-CB4CCA059FC4}" type="datetimeFigureOut">
               <a:rPr lang="en-US" smtClean="0"/>
-              <a:t>7/10/2026</a:t>
+              <a:t>7/14/2026</a:t>
             </a:fld>
             <a:endParaRPr lang="en-US"/>
           </a:p>
@@ -6540,7 +6540,7 @@
           <a:p>
             <a:fld id="{5BCAD085-E8A6-8845-BD4E-CB4CCA059FC4}" type="datetimeFigureOut">
               <a:rPr lang="en-US" smtClean="0"/>
-              <a:t>7/10/2026</a:t>
+              <a:t>7/14/2026</a:t>
             </a:fld>
             <a:endParaRPr lang="en-US"/>
           </a:p>
@@ -6727,7 +6727,7 @@
           <a:p>
             <a:fld id="{5BCAD085-E8A6-8845-BD4E-CB4CCA059FC4}" type="datetimeFigureOut">
               <a:rPr lang="en-US" smtClean="0"/>
-              <a:t>7/10/2026</a:t>
+              <a:t>7/14/2026</a:t>
             </a:fld>
             <a:endParaRPr lang="en-US"/>
           </a:p>
@@ -7562,7 +7562,7 @@
           </a:ln>
           <a:extLst>
             <a:ext uri="{91240B29-F687-4f45-9708-019B960494DF}">
-              <a14:hiddenLine xmlns="" xmlns:a14="http://schemas.microsoft.com/office/drawing/2010/main" w="9525">
+              <a14:hiddenLine xmlns:a14="http://schemas.microsoft.com/office/drawing/2010/main" xmlns="" w="9525">
                 <a:solidFill>
                   <a:srgbClr val="000000"/>
                 </a:solidFill>
@@ -7676,7 +7676,7 @@
           <a:p>
             <a:fld id="{5BCAD085-E8A6-8845-BD4E-CB4CCA059FC4}" type="datetimeFigureOut">
               <a:rPr lang="en-US" smtClean="0"/>
-              <a:t>7/10/2026</a:t>
+              <a:t>7/14/2026</a:t>
             </a:fld>
             <a:endParaRPr lang="en-US"/>
           </a:p>
@@ -7908,7 +7908,7 @@
           <a:p>
             <a:fld id="{5BCAD085-E8A6-8845-BD4E-CB4CCA059FC4}" type="datetimeFigureOut">
               <a:rPr lang="en-US" smtClean="0"/>
-              <a:t>7/10/2026</a:t>
+              <a:t>7/14/2026</a:t>
             </a:fld>
             <a:endParaRPr lang="en-US"/>
           </a:p>
@@ -8737,7 +8737,7 @@
             </a:ln>
             <a:extLst>
               <a:ext uri="{91240B29-F687-4f45-9708-019B960494DF}">
-                <a14:hiddenLine xmlns="" xmlns:a14="http://schemas.microsoft.com/office/drawing/2010/main" w="9525">
+                <a14:hiddenLine xmlns:a14="http://schemas.microsoft.com/office/drawing/2010/main" xmlns="" w="9525">
                   <a:solidFill>
                     <a:srgbClr val="000000"/>
                   </a:solidFill>
@@ -8919,7 +8919,7 @@
           <a:p>
             <a:fld id="{5BCAD085-E8A6-8845-BD4E-CB4CCA059FC4}" type="datetimeFigureOut">
               <a:rPr lang="en-US" smtClean="0"/>
-              <a:t>7/10/2026</a:t>
+              <a:t>7/14/2026</a:t>
             </a:fld>
             <a:endParaRPr lang="en-US"/>
           </a:p>
@@ -9203,7 +9203,7 @@
           <a:p>
             <a:fld id="{5BCAD085-E8A6-8845-BD4E-CB4CCA059FC4}" type="datetimeFigureOut">
               <a:rPr lang="en-US" smtClean="0"/>
-              <a:t>7/10/2026</a:t>
+              <a:t>7/14/2026</a:t>
             </a:fld>
             <a:endParaRPr lang="en-US"/>
           </a:p>
@@ -9603,7 +9603,7 @@
           <a:p>
             <a:fld id="{5BCAD085-E8A6-8845-BD4E-CB4CCA059FC4}" type="datetimeFigureOut">
               <a:rPr lang="en-US" smtClean="0"/>
-              <a:t>7/10/2026</a:t>
+              <a:t>7/14/2026</a:t>
             </a:fld>
             <a:endParaRPr lang="en-US"/>
           </a:p>
@@ -9733,7 +9733,7 @@
           <a:p>
             <a:fld id="{5BCAD085-E8A6-8845-BD4E-CB4CCA059FC4}" type="datetimeFigureOut">
               <a:rPr lang="en-US" smtClean="0"/>
-              <a:t>7/10/2026</a:t>
+              <a:t>7/14/2026</a:t>
             </a:fld>
             <a:endParaRPr lang="en-US"/>
           </a:p>
@@ -9876,7 +9876,7 @@
           <a:p>
             <a:fld id="{5BCAD085-E8A6-8845-BD4E-CB4CCA059FC4}" type="datetimeFigureOut">
               <a:rPr lang="en-US" smtClean="0"/>
-              <a:t>7/10/2026</a:t>
+              <a:t>7/14/2026</a:t>
             </a:fld>
             <a:endParaRPr lang="en-US"/>
           </a:p>
@@ -10705,7 +10705,7 @@
             </a:ln>
             <a:extLst>
               <a:ext uri="{91240B29-F687-4f45-9708-019B960494DF}">
-                <a14:hiddenLine xmlns="" xmlns:a14="http://schemas.microsoft.com/office/drawing/2010/main" w="9525">
+                <a14:hiddenLine xmlns:a14="http://schemas.microsoft.com/office/drawing/2010/main" xmlns="" w="9525">
                   <a:solidFill>
                     <a:srgbClr val="000000"/>
                   </a:solidFill>
@@ -10898,7 +10898,7 @@
           <a:p>
             <a:fld id="{5BCAD085-E8A6-8845-BD4E-CB4CCA059FC4}" type="datetimeFigureOut">
               <a:rPr lang="en-US" smtClean="0"/>
-              <a:t>7/10/2026</a:t>
+              <a:t>7/14/2026</a:t>
             </a:fld>
             <a:endParaRPr lang="en-US"/>
           </a:p>
@@ -11763,7 +11763,7 @@
             </a:ln>
             <a:extLst>
               <a:ext uri="{91240B29-F687-4f45-9708-019B960494DF}">
-                <a14:hiddenLine xmlns="" xmlns:a14="http://schemas.microsoft.com/office/drawing/2010/main" w="9525">
+                <a14:hiddenLine xmlns:a14="http://schemas.microsoft.com/office/drawing/2010/main" xmlns="" w="9525">
                   <a:solidFill>
                     <a:srgbClr val="000000"/>
                   </a:solidFill>
@@ -11980,7 +11980,7 @@
           <a:p>
             <a:fld id="{5BCAD085-E8A6-8845-BD4E-CB4CCA059FC4}" type="datetimeFigureOut">
               <a:rPr lang="en-US" smtClean="0"/>
-              <a:t>7/10/2026</a:t>
+              <a:t>7/14/2026</a:t>
             </a:fld>
             <a:endParaRPr lang="en-US"/>
           </a:p>
@@ -12813,7 +12813,7 @@
             </a:ln>
             <a:extLst>
               <a:ext uri="{91240B29-F687-4f45-9708-019B960494DF}">
-                <a14:hiddenLine xmlns="" xmlns:a14="http://schemas.microsoft.com/office/drawing/2010/main" w="9525">
+                <a14:hiddenLine xmlns:a14="http://schemas.microsoft.com/office/drawing/2010/main" xmlns="" w="9525">
                   <a:solidFill>
                     <a:srgbClr val="000000"/>
                   </a:solidFill>
@@ -12954,7 +12954,7 @@
           <a:p>
             <a:fld id="{5BCAD085-E8A6-8845-BD4E-CB4CCA059FC4}" type="datetimeFigureOut">
               <a:rPr lang="en-US" smtClean="0"/>
-              <a:t>7/10/2026</a:t>
+              <a:t>7/14/2026</a:t>
             </a:fld>
             <a:endParaRPr lang="en-US"/>
           </a:p>
@@ -14368,12 +14368,20 @@
               <a:t>• </a:t>
             </a:r>
             <a:r>
-              <a:rPr dirty="0" err="1"/>
-              <a:t>Avg</a:t>
+              <a:rPr dirty="0" smtClean="0"/>
+              <a:t>Av</a:t>
+            </a:r>
+            <a:r>
+              <a:rPr lang="en-US" dirty="0" smtClean="0"/>
+              <a:t>erage</a:t>
+            </a:r>
+            <a:r>
+              <a:rPr dirty="0" smtClean="0"/>
+              <a:t> </a:t>
             </a:r>
             <a:r>
               <a:rPr dirty="0"/>
-              <a:t> Ticket Price</a:t>
+              <a:t>Ticket Price</a:t>
             </a:r>
           </a:p>
           <a:p>
